--- a/2026 AFDP Python Training/Introduction to Python - AFDP 2026.pptx
+++ b/2026 AFDP Python Training/Introduction to Python - AFDP 2026.pptx
@@ -15064,7 +15064,7 @@
           <a:p>
             <a:fld id="{1887E9ED-FAFB-438A-8FBC-78BC5F57B1C8}" type="datetimeFigureOut">
               <a:rPr lang="en-US" smtClean="0"/>
-              <a:t>9/2/26</a:t>
+              <a:t>9/3/26</a:t>
             </a:fld>
             <a:endParaRPr lang="en-US"/>
           </a:p>
@@ -16216,99 +16216,125 @@
           <a:lstStyle/>
           <a:p>
             <a:r>
+              <a:rPr dirty="0"/>
               <a:t>Timing: about 4 minutes. Pick two of the five points below rather than reading all of them.</a:t>
             </a:r>
           </a:p>
           <a:p>
-            <a:endParaRPr/>
+            <a:endParaRPr dirty="0"/>
           </a:p>
           <a:p>
             <a:r>
+              <a:rPr dirty="0"/>
               <a:t>1. Keeps Your Teaching Relevant</a:t>
             </a:r>
           </a:p>
           <a:p>
             <a:r>
+              <a:rPr dirty="0"/>
               <a:t>If you bring Python into class: You’re teaching with the same tools used by actuaries in companies. Students see direct value in what you teach.</a:t>
             </a:r>
           </a:p>
           <a:p>
             <a:r>
+              <a:rPr dirty="0"/>
               <a:t>If you don’t: Students may feel they have to “relearn” everything later at work or through online courses, which makes your classes look a bit outdated.</a:t>
             </a:r>
           </a:p>
           <a:p>
             <a:r>
+              <a:rPr dirty="0"/>
               <a:t>2. Makes Classes More Engaging</a:t>
             </a:r>
           </a:p>
           <a:p>
             <a:r>
+              <a:rPr dirty="0"/>
               <a:t>With Python: Imagine showing students a real dataset — say mortality rates or claim histories — and running a quick simulation live in class. Students light up when they see theory in action.</a:t>
             </a:r>
           </a:p>
           <a:p>
             <a:r>
+              <a:rPr dirty="0"/>
               <a:t>Without Python: Lessons can feel abstract, stuck in formulas and static Excel sheets. Students start wondering, “But how does this work in the real world?”</a:t>
             </a:r>
           </a:p>
           <a:p>
             <a:r>
+              <a:rPr dirty="0"/>
               <a:t>3. Saves Teachers Time</a:t>
             </a:r>
           </a:p>
           <a:p>
             <a:r>
+              <a:rPr dirty="0"/>
               <a:t>With Python: You can automate grading small assignments, re-use simulations year after year, or demonstrate complex topics (like Monte Carlo or GLMs) in minutes.</a:t>
             </a:r>
           </a:p>
           <a:p>
             <a:r>
+              <a:rPr dirty="0"/>
               <a:t>Without Python: Every example needs manual effort — building new spreadsheets, slides, or long explanations that eat up your prep time.</a:t>
             </a:r>
           </a:p>
           <a:p>
             <a:r>
+              <a:rPr dirty="0"/>
               <a:t>4. Boosts Student Careers (and Your Reputation)</a:t>
             </a:r>
           </a:p>
           <a:p>
             <a:r>
+              <a:rPr dirty="0"/>
               <a:t>With Python: Your students get jobs faster and give credit to you for teaching them practical skills. This enhances your standing as a teacher who “gets it.”</a:t>
             </a:r>
           </a:p>
           <a:p>
             <a:r>
+              <a:rPr dirty="0"/>
               <a:t>Without Python: Students may still succeed, but often after re-skilling outside. They remember the online course that helped them more than your class.</a:t>
             </a:r>
           </a:p>
           <a:p>
             <a:r>
+              <a:rPr dirty="0"/>
               <a:t>5. Keeps You Future-Proof</a:t>
             </a:r>
           </a:p>
           <a:p>
             <a:r>
-              <a:t>With Python: You stay aligned with global actuarial bodies (SOA, IFoA, CAS), all of which now emphasize data science and coding.</a:t>
+              <a:rPr dirty="0"/>
+              <a:t>With Python: You stay aligned with global actuarial bodies (SOA, </a:t>
             </a:r>
-          </a:p>
-          <a:p>
             <a:r>
+              <a:rPr dirty="0" err="1"/>
+              <a:t>IFoA</a:t>
+            </a:r>
+            <a:r>
+              <a:rPr dirty="0"/>
+              <a:t>, CAS), all of which now emphasize data science and coding.</a:t>
+            </a:r>
+          </a:p>
+          <a:p>
+            <a:r>
+              <a:rPr dirty="0"/>
               <a:t>Without Python: There’s a risk of your curriculum being viewed as “traditional but outdated.”</a:t>
             </a:r>
           </a:p>
           <a:p>
             <a:r>
+              <a:rPr dirty="0"/>
               <a:t>🌟 In Simple Words</a:t>
             </a:r>
           </a:p>
           <a:p>
             <a:r>
+              <a:rPr dirty="0"/>
               <a:t>Python is not about replacing what you already teach. It’s about making actuarial science come alive in the classroom, preparing students for the real world, and saving yourself effort along the way.</a:t>
             </a:r>
           </a:p>
           <a:p>
-            <a:endParaRPr/>
+            <a:endParaRPr dirty="0"/>
           </a:p>
         </p:txBody>
       </p:sp>
@@ -16393,159 +16419,198 @@
           <a:lstStyle/>
           <a:p>
             <a:r>
+              <a:rPr dirty="0"/>
               <a:t>Timing: about 3 minutes. The seven points are on the slide; talk to two or three of them and let the rest sit. The line at the bottom is the one to leave them with.</a:t>
             </a:r>
           </a:p>
           <a:p>
-            <a:endParaRPr/>
+            <a:endParaRPr dirty="0"/>
           </a:p>
           <a:p>
             <a:r>
+              <a:rPr dirty="0"/>
               <a:t>1. Working with Big Data</a:t>
             </a:r>
           </a:p>
           <a:p>
             <a:r>
+              <a:rPr dirty="0"/>
               <a:t>Insurance companies deal with millions of claims, policies, and transactions.</a:t>
             </a:r>
           </a:p>
           <a:p>
             <a:r>
+              <a:rPr dirty="0"/>
               <a:t>✅ If you know Python: You can clean, process, and analyze data in minutes using libraries like Pandas. Imagine detecting fraud patterns across millions of health claims in a single afternoon.</a:t>
             </a:r>
           </a:p>
           <a:p>
             <a:r>
+              <a:rPr dirty="0"/>
               <a:t>❌ If you don’t: You’ll be stuck with Excel crashing when you try to open a file with half a million rows.</a:t>
             </a:r>
           </a:p>
           <a:p>
             <a:r>
+              <a:rPr dirty="0"/>
               <a:t>2. Predicting the Future (Literally!)</a:t>
             </a:r>
           </a:p>
           <a:p>
             <a:r>
+              <a:rPr dirty="0"/>
               <a:t>Actuaries forecast risks — and Python is perfect for machine learning and predictive models.</a:t>
             </a:r>
           </a:p>
           <a:p>
             <a:r>
+              <a:rPr dirty="0"/>
               <a:t>✅ If you know Python: You can build models that predict who is likely to cancel a policy or which customers are higher risk. That’s the kind of stuff companies love.</a:t>
             </a:r>
           </a:p>
           <a:p>
             <a:r>
+              <a:rPr dirty="0"/>
               <a:t>❌ If you don’t: You risk being seen as “old-school,” while data scientists step in to do the exciting projects.</a:t>
             </a:r>
           </a:p>
           <a:p>
             <a:r>
+              <a:rPr dirty="0"/>
               <a:t>3. Saving Time with Automation</a:t>
             </a:r>
           </a:p>
           <a:p>
             <a:r>
+              <a:rPr dirty="0"/>
               <a:t>A lot of actuarial work is repetitive — reserve calculations, reports, compliance filings.</a:t>
             </a:r>
           </a:p>
           <a:p>
             <a:r>
+              <a:rPr dirty="0"/>
               <a:t>✅ If you know Python: Write one script, and boom — quarterly reports generate automatically. More time for analysis and coffee ☕.</a:t>
             </a:r>
           </a:p>
           <a:p>
             <a:r>
+              <a:rPr dirty="0"/>
               <a:t>❌ If you don’t: You’ll spend nights copy-pasting numbers, double-checking formulas, and hoping you didn’t miss a zero.</a:t>
             </a:r>
           </a:p>
           <a:p>
             <a:r>
+              <a:rPr dirty="0"/>
               <a:t>4. Standing Out in Job Interviews</a:t>
             </a:r>
           </a:p>
           <a:p>
             <a:r>
+              <a:rPr dirty="0"/>
               <a:t>Employers today want actuaries who can code, and Python is the most asked for.</a:t>
             </a:r>
           </a:p>
           <a:p>
             <a:r>
+              <a:rPr dirty="0"/>
               <a:t>✅ If you know Python: You can walk into an interview and show a mini-project — maybe a claims reserving dashboard you built. Instant brownie points.</a:t>
             </a:r>
           </a:p>
           <a:p>
             <a:r>
+              <a:rPr dirty="0"/>
               <a:t>❌ If you don’t: You might still get a job, but your growth could be slower, because companies prefer people who can do both — actuarial + coding.</a:t>
             </a:r>
           </a:p>
           <a:p>
             <a:r>
+              <a:rPr dirty="0"/>
               <a:t>5. Connecting with Other Tools</a:t>
             </a:r>
           </a:p>
           <a:p>
             <a:r>
+              <a:rPr dirty="0"/>
               <a:t>Python plays well with Excel, SQL, and even actuarial software like Prophet.</a:t>
             </a:r>
           </a:p>
           <a:p>
             <a:r>
+              <a:rPr dirty="0"/>
               <a:t>✅ If you know Python: You can pull data from a database, clean it, and create an Excel dashboard — all in one go.</a:t>
             </a:r>
           </a:p>
           <a:p>
             <a:r>
+              <a:rPr dirty="0"/>
               <a:t>❌ If you don’t: You’ll depend on IT or data teams for every little task, slowing you down.</a:t>
             </a:r>
           </a:p>
           <a:p>
             <a:r>
+              <a:rPr dirty="0"/>
               <a:t>6. Keeping Up with the Profession</a:t>
             </a:r>
           </a:p>
           <a:p>
             <a:r>
-              <a:t>Globally, actuarial bodies (SOA, IFoA, CAS) are encouraging Python.</a:t>
+              <a:rPr dirty="0"/>
+              <a:t>Globally, actuarial bodies (SOA, </a:t>
             </a:r>
-          </a:p>
-          <a:p>
             <a:r>
+              <a:rPr dirty="0" err="1"/>
+              <a:t>IFoA</a:t>
+            </a:r>
+            <a:r>
+              <a:rPr dirty="0"/>
+              <a:t>, CAS) are encouraging Python.</a:t>
+            </a:r>
+          </a:p>
+          <a:p>
+            <a:r>
+              <a:rPr dirty="0"/>
               <a:t>✅ If you know Python: You’ll be ready for case studies, research, and even overseas roles.</a:t>
             </a:r>
           </a:p>
           <a:p>
             <a:r>
+              <a:rPr dirty="0"/>
               <a:t>❌ If you don’t: You might feel left behind when exams or projects expect you to code.</a:t>
             </a:r>
           </a:p>
           <a:p>
             <a:r>
+              <a:rPr dirty="0"/>
               <a:t>7. Room for Innovation</a:t>
             </a:r>
           </a:p>
           <a:p>
             <a:r>
+              <a:rPr dirty="0"/>
               <a:t>Python is free, open-source, and has endless libraries.</a:t>
             </a:r>
           </a:p>
           <a:p>
             <a:r>
+              <a:rPr dirty="0"/>
               <a:t>✅ If you know Python: You can experiment — model climate risks, run catastrophe simulations, or even create an app for micro-insurance.</a:t>
             </a:r>
           </a:p>
           <a:p>
             <a:r>
+              <a:rPr dirty="0"/>
               <a:t>❌ If you don’t: You’ll be limited to whatever traditional tools allow you to do.</a:t>
             </a:r>
           </a:p>
           <a:p>
             <a:r>
+              <a:rPr dirty="0"/>
               <a:t>🌟 The Bottom Line</a:t>
             </a:r>
           </a:p>
           <a:p>
             <a:r>
+              <a:rPr dirty="0"/>
               <a:t>Learning Python won’t make you less of an actuary — it’ll make you a smarter, faster, and more future-ready actuary.</a:t>
             </a:r>
           </a:p>
@@ -20323,7 +20388,7 @@
         <p:spPr>
           <a:xfrm>
             <a:off x="4305298" y="2304934"/>
-            <a:ext cx="5343527" cy="1200329"/>
+            <a:ext cx="5343527" cy="830997"/>
           </a:xfrm>
           <a:prstGeom prst="rect">
             <a:avLst/>
@@ -20352,7 +20417,7 @@
                   <a:schemeClr val="bg1"/>
                 </a:solidFill>
               </a:rPr>
-              <a:t>Professor of Practice &amp; Coordinator, CADS, SSSIHL</a:t>
+              <a:t>Chairman, SSSIA</a:t>
             </a:r>
           </a:p>
         </p:txBody>
@@ -20401,7 +20466,7 @@
                   <a:schemeClr val="bg1"/>
                 </a:solidFill>
               </a:rPr>
-              <a:t>Visiting Faculty, CADS, SSSIHL</a:t>
+              <a:t>Adjunct Faculty, SSSIA</a:t>
             </a:r>
           </a:p>
         </p:txBody>
@@ -22563,15 +22628,6 @@
 </file>
 
 <file path=customXml/item2.xml><?xml version="1.0" encoding="utf-8"?>
-<?mso-contentType ?>
-<FormTemplates xmlns="http://schemas.microsoft.com/sharepoint/v3/contenttype/forms">
-  <Display>DocumentLibraryForm</Display>
-  <Edit>DocumentLibraryForm</Edit>
-  <New>DocumentLibraryForm</New>
-</FormTemplates>
-</file>
-
-<file path=customXml/item3.xml><?xml version="1.0" encoding="utf-8"?>
 <ct:contentTypeSchema xmlns:ct="http://schemas.microsoft.com/office/2006/metadata/contentType" xmlns:ma="http://schemas.microsoft.com/office/2006/metadata/properties/metaAttributes" ct:_="" ma:_="" ma:contentTypeName="Document" ma:contentTypeID="0x01010073397C6321A5CD4F9AEF20D465EC24EA" ma:contentTypeVersion="11" ma:contentTypeDescription="Create a new document." ma:contentTypeScope="" ma:versionID="62f04c541ba0253f91b331ea43e2d9ea">
   <xsd:schema xmlns:xsd="http://www.w3.org/2001/XMLSchema" xmlns:xs="http://www.w3.org/2001/XMLSchema" xmlns:p="http://schemas.microsoft.com/office/2006/metadata/properties" xmlns:ns2="7365838e-5742-406c-8643-fccf082479df" xmlns:ns3="52d5e68b-42aa-4e72-89be-0e77d4ed4a9a" targetNamespace="http://schemas.microsoft.com/office/2006/metadata/properties" ma:root="true" ma:fieldsID="5cae06a019a75c24c9c9fbb798a26d9e" ns2:_="" ns3:_="">
     <xsd:import namespace="7365838e-5742-406c-8643-fccf082479df"/>
@@ -22764,6 +22820,15 @@
 </ct:contentTypeSchema>
 </file>
 
+<file path=customXml/item3.xml><?xml version="1.0" encoding="utf-8"?>
+<?mso-contentType ?>
+<FormTemplates xmlns="http://schemas.microsoft.com/sharepoint/v3/contenttype/forms">
+  <Display>DocumentLibraryForm</Display>
+  <Edit>DocumentLibraryForm</Edit>
+  <New>DocumentLibraryForm</New>
+</FormTemplates>
+</file>
+
 <file path=customXml/itemProps1.xml><?xml version="1.0" encoding="utf-8"?>
 <ds:datastoreItem xmlns:ds="http://schemas.openxmlformats.org/officeDocument/2006/customXml" ds:itemID="{54731122-71DB-458F-AC4E-8E8476744D67}">
   <ds:schemaRefs>
@@ -22776,14 +22841,6 @@
 </file>
 
 <file path=customXml/itemProps2.xml><?xml version="1.0" encoding="utf-8"?>
-<ds:datastoreItem xmlns:ds="http://schemas.openxmlformats.org/officeDocument/2006/customXml" ds:itemID="{5C0F0FD8-AA63-472B-8818-855F28185CF4}">
-  <ds:schemaRefs>
-    <ds:schemaRef ds:uri="http://schemas.microsoft.com/sharepoint/v3/contenttype/forms"/>
-  </ds:schemaRefs>
-</ds:datastoreItem>
-</file>
-
-<file path=customXml/itemProps3.xml><?xml version="1.0" encoding="utf-8"?>
 <ds:datastoreItem xmlns:ds="http://schemas.openxmlformats.org/officeDocument/2006/customXml" ds:itemID="{66018E8E-3D62-475A-9DCE-635C56ACCBF4}">
   <ds:schemaRefs>
     <ds:schemaRef ds:uri="http://schemas.microsoft.com/office/2006/metadata/contentType"/>
@@ -22800,4 +22857,12 @@
     <ds:schemaRef ds:uri="http://schemas.microsoft.com/internal/obd"/>
   </ds:schemaRefs>
 </ds:datastoreItem>
+</file>
+
+<file path=customXml/itemProps3.xml><?xml version="1.0" encoding="utf-8"?>
+<ds:datastoreItem xmlns:ds="http://schemas.openxmlformats.org/officeDocument/2006/customXml" ds:itemID="{5C0F0FD8-AA63-472B-8818-855F28185CF4}">
+  <ds:schemaRefs>
+    <ds:schemaRef ds:uri="http://schemas.microsoft.com/sharepoint/v3/contenttype/forms"/>
+  </ds:schemaRefs>
+</ds:datastoreItem>
 </file>
--- a/2026 AFDP Python Training/Introduction to Python - AFDP 2026.pptx
+++ b/2026 AFDP Python Training/Introduction to Python - AFDP 2026.pptx
@@ -22617,14 +22617,12 @@
 </file>
 
 <file path=customXml/item1.xml><?xml version="1.0" encoding="utf-8"?>
-<p:properties xmlns:p="http://schemas.microsoft.com/office/2006/metadata/properties" xmlns:xsi="http://www.w3.org/2001/XMLSchema-instance" xmlns:pc="http://schemas.microsoft.com/office/infopath/2007/PartnerControls">
-  <documentManagement>
-    <lcf76f155ced4ddcb4097134ff3c332f xmlns="7365838e-5742-406c-8643-fccf082479df">
-      <Terms xmlns="http://schemas.microsoft.com/office/infopath/2007/PartnerControls"/>
-    </lcf76f155ced4ddcb4097134ff3c332f>
-    <TaxCatchAll xmlns="52d5e68b-42aa-4e72-89be-0e77d4ed4a9a" xsi:nil="true"/>
-  </documentManagement>
-</p:properties>
+<?mso-contentType ?>
+<FormTemplates xmlns="http://schemas.microsoft.com/sharepoint/v3/contenttype/forms">
+  <Display>DocumentLibraryForm</Display>
+  <Edit>DocumentLibraryForm</Edit>
+  <New>DocumentLibraryForm</New>
+</FormTemplates>
 </file>
 
 <file path=customXml/item2.xml><?xml version="1.0" encoding="utf-8"?>
@@ -22821,21 +22819,20 @@
 </file>
 
 <file path=customXml/item3.xml><?xml version="1.0" encoding="utf-8"?>
-<?mso-contentType ?>
-<FormTemplates xmlns="http://schemas.microsoft.com/sharepoint/v3/contenttype/forms">
-  <Display>DocumentLibraryForm</Display>
-  <Edit>DocumentLibraryForm</Edit>
-  <New>DocumentLibraryForm</New>
-</FormTemplates>
+<p:properties xmlns:p="http://schemas.microsoft.com/office/2006/metadata/properties" xmlns:xsi="http://www.w3.org/2001/XMLSchema-instance" xmlns:pc="http://schemas.microsoft.com/office/infopath/2007/PartnerControls">
+  <documentManagement>
+    <lcf76f155ced4ddcb4097134ff3c332f xmlns="7365838e-5742-406c-8643-fccf082479df">
+      <Terms xmlns="http://schemas.microsoft.com/office/infopath/2007/PartnerControls"/>
+    </lcf76f155ced4ddcb4097134ff3c332f>
+    <TaxCatchAll xmlns="52d5e68b-42aa-4e72-89be-0e77d4ed4a9a" xsi:nil="true"/>
+  </documentManagement>
+</p:properties>
 </file>
 
 <file path=customXml/itemProps1.xml><?xml version="1.0" encoding="utf-8"?>
-<ds:datastoreItem xmlns:ds="http://schemas.openxmlformats.org/officeDocument/2006/customXml" ds:itemID="{54731122-71DB-458F-AC4E-8E8476744D67}">
+<ds:datastoreItem xmlns:ds="http://schemas.openxmlformats.org/officeDocument/2006/customXml" ds:itemID="{5C0F0FD8-AA63-472B-8818-855F28185CF4}">
   <ds:schemaRefs>
-    <ds:schemaRef ds:uri="http://schemas.microsoft.com/office/2006/metadata/properties"/>
-    <ds:schemaRef ds:uri="http://schemas.microsoft.com/office/infopath/2007/PartnerControls"/>
-    <ds:schemaRef ds:uri="7365838e-5742-406c-8643-fccf082479df"/>
-    <ds:schemaRef ds:uri="52d5e68b-42aa-4e72-89be-0e77d4ed4a9a"/>
+    <ds:schemaRef ds:uri="http://schemas.microsoft.com/sharepoint/v3/contenttype/forms"/>
   </ds:schemaRefs>
 </ds:datastoreItem>
 </file>
@@ -22860,9 +22857,12 @@
 </file>
 
 <file path=customXml/itemProps3.xml><?xml version="1.0" encoding="utf-8"?>
-<ds:datastoreItem xmlns:ds="http://schemas.openxmlformats.org/officeDocument/2006/customXml" ds:itemID="{5C0F0FD8-AA63-472B-8818-855F28185CF4}">
+<ds:datastoreItem xmlns:ds="http://schemas.openxmlformats.org/officeDocument/2006/customXml" ds:itemID="{54731122-71DB-458F-AC4E-8E8476744D67}">
   <ds:schemaRefs>
-    <ds:schemaRef ds:uri="http://schemas.microsoft.com/sharepoint/v3/contenttype/forms"/>
+    <ds:schemaRef ds:uri="http://schemas.microsoft.com/office/2006/metadata/properties"/>
+    <ds:schemaRef ds:uri="http://schemas.microsoft.com/office/infopath/2007/PartnerControls"/>
+    <ds:schemaRef ds:uri="7365838e-5742-406c-8643-fccf082479df"/>
+    <ds:schemaRef ds:uri="52d5e68b-42aa-4e72-89be-0e77d4ed4a9a"/>
   </ds:schemaRefs>
 </ds:datastoreItem>
 </file>